--- a/textbook/ppt/chapter13_ppt.pptx
+++ b/textbook/ppt/chapter13_ppt.pptx
@@ -7,6 +7,12 @@
   <p:sldIdLst>
     <p:sldId id="256" r:id="rId7"/>
     <p:sldId id="257" r:id="rId8"/>
+    <p:sldId id="258" r:id="rId9"/>
+    <p:sldId id="259" r:id="rId10"/>
+    <p:sldId id="260" r:id="rId11"/>
+    <p:sldId id="261" r:id="rId12"/>
+    <p:sldId id="262" r:id="rId13"/>
+    <p:sldId id="263" r:id="rId14"/>
   </p:sldIdLst>
   <p:sldSz cx="12188952" cy="6858000" type="screen4x3"/>
   <p:notesSz cx="6858000" cy="9144000"/>
@@ -3229,6 +3235,644 @@
             <a:r>
               <a:rPr sz="1800"/>
               <a:t>• 剪枝优化的基本概念与应用</a:t>
+            </a:r>
+          </a:p>
+        </p:txBody>
+      </p:sp>
+    </p:spTree>
+  </p:cSld>
+  <p:clrMapOvr>
+    <a:masterClrMapping/>
+  </p:clrMapOvr>
+</p:sld>
+</file>
+
+<file path=ppt/slides/slide3.xml><?xml version="1.0" encoding="utf-8"?>
+<p:sld xmlns:a="http://schemas.openxmlformats.org/drawingml/2006/main" xmlns:p="http://schemas.openxmlformats.org/presentationml/2006/main" xmlns:r="http://schemas.openxmlformats.org/officeDocument/2006/relationships">
+  <p:cSld>
+    <p:spTree>
+      <p:nvGrpSpPr>
+        <p:cNvPr id="1" name=""/>
+        <p:cNvGrpSpPr/>
+        <p:nvPr/>
+      </p:nvGrpSpPr>
+      <p:grpSpPr/>
+      <p:sp>
+        <p:nvSpPr>
+          <p:cNvPr id="2" name="TextBox 1"/>
+          <p:cNvSpPr txBox="1"/>
+          <p:nvPr/>
+        </p:nvSpPr>
+        <p:spPr>
+          <a:xfrm>
+            <a:off x="914400" y="457200"/>
+            <a:ext cx="10058400" cy="914400"/>
+          </a:xfrm>
+          <a:prstGeom prst="rect">
+            <a:avLst/>
+          </a:prstGeom>
+          <a:noFill/>
+        </p:spPr>
+        <p:txBody>
+          <a:bodyPr wrap="none">
+            <a:spAutoFit/>
+          </a:bodyPr>
+          <a:lstStyle/>
+          <a:p>
+            <a:r>
+              <a:rPr sz="2800" b="1">
+                <a:solidFill>
+                  <a:srgbClr val="8B0000"/>
+                </a:solidFill>
+              </a:rPr>
+              <a:t>本章概览</a:t>
+            </a:r>
+          </a:p>
+        </p:txBody>
+      </p:sp>
+      <p:sp>
+        <p:nvSpPr>
+          <p:cNvPr id="3" name="TextBox 2"/>
+          <p:cNvSpPr txBox="1"/>
+          <p:nvPr/>
+        </p:nvSpPr>
+        <p:spPr>
+          <a:xfrm>
+            <a:off x="914400" y="1371600"/>
+            <a:ext cx="10058400" cy="5029200"/>
+          </a:xfrm>
+          <a:prstGeom prst="rect">
+            <a:avLst/>
+          </a:prstGeom>
+          <a:noFill/>
+        </p:spPr>
+        <p:txBody>
+          <a:bodyPr wrap="none">
+            <a:spAutoFit/>
+          </a:bodyPr>
+          <a:lstStyle/>
+          <a:p/>
+          <a:p>
+            <a:r>
+              <a:rPr sz="1600">
+                <a:solidFill>
+                  <a:srgbClr val="000000"/>
+                </a:solidFill>
+              </a:rPr>
+              <a:t>DFS：深度优先，用栈/递归实现</a:t>
+            </a:r>
+          </a:p>
+          <a:p>
+            <a:r>
+              <a:rPr sz="1600">
+                <a:solidFill>
+                  <a:srgbClr val="000000"/>
+                </a:solidFill>
+              </a:rPr>
+              <a:t>BFS：广度优先，用队列实现</a:t>
+            </a:r>
+          </a:p>
+          <a:p>
+            <a:r>
+              <a:rPr sz="1600">
+                <a:solidFill>
+                  <a:srgbClr val="000000"/>
+                </a:solidFill>
+              </a:rPr>
+              <a:t>回溯：选→递归→撤销</a:t>
+            </a:r>
+          </a:p>
+          <a:p>
+            <a:r>
+              <a:rPr sz="1600">
+                <a:solidFill>
+                  <a:srgbClr val="000000"/>
+                </a:solidFill>
+              </a:rPr>
+              <a:t>剪枝：提前终止无效分支</a:t>
+            </a:r>
+          </a:p>
+        </p:txBody>
+      </p:sp>
+    </p:spTree>
+  </p:cSld>
+  <p:clrMapOvr>
+    <a:masterClrMapping/>
+  </p:clrMapOvr>
+</p:sld>
+</file>
+
+<file path=ppt/slides/slide4.xml><?xml version="1.0" encoding="utf-8"?>
+<p:sld xmlns:a="http://schemas.openxmlformats.org/drawingml/2006/main" xmlns:p="http://schemas.openxmlformats.org/presentationml/2006/main" xmlns:r="http://schemas.openxmlformats.org/officeDocument/2006/relationships">
+  <p:cSld>
+    <p:spTree>
+      <p:nvGrpSpPr>
+        <p:cNvPr id="1" name=""/>
+        <p:cNvGrpSpPr/>
+        <p:nvPr/>
+      </p:nvGrpSpPr>
+      <p:grpSpPr/>
+      <p:sp>
+        <p:nvSpPr>
+          <p:cNvPr id="2" name="TextBox 1"/>
+          <p:cNvSpPr txBox="1"/>
+          <p:nvPr/>
+        </p:nvSpPr>
+        <p:spPr>
+          <a:xfrm>
+            <a:off x="914400" y="457200"/>
+            <a:ext cx="10058400" cy="914400"/>
+          </a:xfrm>
+          <a:prstGeom prst="rect">
+            <a:avLst/>
+          </a:prstGeom>
+          <a:noFill/>
+        </p:spPr>
+        <p:txBody>
+          <a:bodyPr wrap="none">
+            <a:spAutoFit/>
+          </a:bodyPr>
+          <a:lstStyle/>
+          <a:p>
+            <a:r>
+              <a:rPr sz="2800" b="1">
+                <a:solidFill>
+                  <a:srgbClr val="8B0000"/>
+                </a:solidFill>
+              </a:rPr>
+              <a:t>C++ 代码示例</a:t>
+            </a:r>
+          </a:p>
+        </p:txBody>
+      </p:sp>
+      <p:sp>
+        <p:nvSpPr>
+          <p:cNvPr id="3" name="TextBox 2"/>
+          <p:cNvSpPr txBox="1"/>
+          <p:nvPr/>
+        </p:nvSpPr>
+        <p:spPr>
+          <a:xfrm>
+            <a:off x="914400" y="1371600"/>
+            <a:ext cx="10058400" cy="5029200"/>
+          </a:xfrm>
+          <a:prstGeom prst="rect">
+            <a:avLst/>
+          </a:prstGeom>
+          <a:noFill/>
+        </p:spPr>
+        <p:txBody>
+          <a:bodyPr wrap="none">
+            <a:spAutoFit/>
+          </a:bodyPr>
+          <a:lstStyle/>
+          <a:p/>
+          <a:p>
+            <a:r>
+              <a:rPr sz="1400">
+                <a:solidFill>
+                  <a:srgbClr val="000000"/>
+                </a:solidFill>
+              </a:rPr>
+              <a:t>void dfs(int u) {
+    if (u == n) { output(); return; }
+    for (int i = 1; i &lt;= n; i++) {
+        if (!used[i]) {
+            used[i] = true;
+            path[u] = i;
+            dfs(u + 1);
+            used[i] = false;
+        }
+    }
+}</a:t>
+            </a:r>
+          </a:p>
+        </p:txBody>
+      </p:sp>
+    </p:spTree>
+  </p:cSld>
+  <p:clrMapOvr>
+    <a:masterClrMapping/>
+  </p:clrMapOvr>
+</p:sld>
+</file>
+
+<file path=ppt/slides/slide5.xml><?xml version="1.0" encoding="utf-8"?>
+<p:sld xmlns:a="http://schemas.openxmlformats.org/drawingml/2006/main" xmlns:p="http://schemas.openxmlformats.org/presentationml/2006/main" xmlns:r="http://schemas.openxmlformats.org/officeDocument/2006/relationships">
+  <p:cSld>
+    <p:spTree>
+      <p:nvGrpSpPr>
+        <p:cNvPr id="1" name=""/>
+        <p:cNvGrpSpPr/>
+        <p:nvPr/>
+      </p:nvGrpSpPr>
+      <p:grpSpPr/>
+      <p:sp>
+        <p:nvSpPr>
+          <p:cNvPr id="2" name="TextBox 1"/>
+          <p:cNvSpPr txBox="1"/>
+          <p:nvPr/>
+        </p:nvSpPr>
+        <p:spPr>
+          <a:xfrm>
+            <a:off x="914400" y="457200"/>
+            <a:ext cx="10058400" cy="914400"/>
+          </a:xfrm>
+          <a:prstGeom prst="rect">
+            <a:avLst/>
+          </a:prstGeom>
+          <a:noFill/>
+        </p:spPr>
+        <p:txBody>
+          <a:bodyPr wrap="none">
+            <a:spAutoFit/>
+          </a:bodyPr>
+          <a:lstStyle/>
+          <a:p>
+            <a:r>
+              <a:rPr sz="2800" b="1">
+                <a:solidFill>
+                  <a:srgbClr val="8B0000"/>
+                </a:solidFill>
+              </a:rPr>
+              <a:t>Python 代码示例</a:t>
+            </a:r>
+          </a:p>
+        </p:txBody>
+      </p:sp>
+      <p:sp>
+        <p:nvSpPr>
+          <p:cNvPr id="3" name="TextBox 2"/>
+          <p:cNvSpPr txBox="1"/>
+          <p:nvPr/>
+        </p:nvSpPr>
+        <p:spPr>
+          <a:xfrm>
+            <a:off x="914400" y="1371600"/>
+            <a:ext cx="10058400" cy="5029200"/>
+          </a:xfrm>
+          <a:prstGeom prst="rect">
+            <a:avLst/>
+          </a:prstGeom>
+          <a:noFill/>
+        </p:spPr>
+        <p:txBody>
+          <a:bodyPr wrap="none">
+            <a:spAutoFit/>
+          </a:bodyPr>
+          <a:lstStyle/>
+          <a:p/>
+          <a:p>
+            <a:r>
+              <a:rPr sz="1400">
+                <a:solidFill>
+                  <a:srgbClr val="000000"/>
+                </a:solidFill>
+              </a:rPr>
+              <a:t>def dfs(u):
+    if u == n:
+        output(); return
+    for i in range(1, n+1):
+        if not used[i]:
+            used[i] = True
+            path[u] = i
+            dfs(u + 1)
+            used[i] = False</a:t>
+            </a:r>
+          </a:p>
+        </p:txBody>
+      </p:sp>
+    </p:spTree>
+  </p:cSld>
+  <p:clrMapOvr>
+    <a:masterClrMapping/>
+  </p:clrMapOvr>
+</p:sld>
+</file>
+
+<file path=ppt/slides/slide6.xml><?xml version="1.0" encoding="utf-8"?>
+<p:sld xmlns:a="http://schemas.openxmlformats.org/drawingml/2006/main" xmlns:p="http://schemas.openxmlformats.org/presentationml/2006/main" xmlns:r="http://schemas.openxmlformats.org/officeDocument/2006/relationships">
+  <p:cSld>
+    <p:spTree>
+      <p:nvGrpSpPr>
+        <p:cNvPr id="1" name=""/>
+        <p:cNvGrpSpPr/>
+        <p:nvPr/>
+      </p:nvGrpSpPr>
+      <p:grpSpPr/>
+      <p:sp>
+        <p:nvSpPr>
+          <p:cNvPr id="2" name="TextBox 1"/>
+          <p:cNvSpPr txBox="1"/>
+          <p:nvPr/>
+        </p:nvSpPr>
+        <p:spPr>
+          <a:xfrm>
+            <a:off x="914400" y="457200"/>
+            <a:ext cx="10058400" cy="914400"/>
+          </a:xfrm>
+          <a:prstGeom prst="rect">
+            <a:avLst/>
+          </a:prstGeom>
+          <a:noFill/>
+        </p:spPr>
+        <p:txBody>
+          <a:bodyPr wrap="none">
+            <a:spAutoFit/>
+          </a:bodyPr>
+          <a:lstStyle/>
+          <a:p>
+            <a:r>
+              <a:rPr sz="2800" b="1">
+                <a:solidFill>
+                  <a:srgbClr val="8B0000"/>
+                </a:solidFill>
+              </a:rPr>
+              <a:t>常见错误</a:t>
+            </a:r>
+          </a:p>
+        </p:txBody>
+      </p:sp>
+      <p:sp>
+        <p:nvSpPr>
+          <p:cNvPr id="3" name="TextBox 2"/>
+          <p:cNvSpPr txBox="1"/>
+          <p:nvPr/>
+        </p:nvSpPr>
+        <p:spPr>
+          <a:xfrm>
+            <a:off x="914400" y="1371600"/>
+            <a:ext cx="10058400" cy="5029200"/>
+          </a:xfrm>
+          <a:prstGeom prst="rect">
+            <a:avLst/>
+          </a:prstGeom>
+          <a:noFill/>
+        </p:spPr>
+        <p:txBody>
+          <a:bodyPr wrap="none">
+            <a:spAutoFit/>
+          </a:bodyPr>
+          <a:lstStyle/>
+          <a:p/>
+          <a:p>
+            <a:r>
+              <a:rPr sz="1600">
+                <a:solidFill>
+                  <a:srgbClr val="000000"/>
+                </a:solidFill>
+              </a:rPr>
+              <a:t>DFS忘记回溯</a:t>
+            </a:r>
+          </a:p>
+          <a:p>
+            <a:r>
+              <a:rPr sz="1600">
+                <a:solidFill>
+                  <a:srgbClr val="000000"/>
+                </a:solidFill>
+              </a:rPr>
+              <a:t>BFS忘记标记已访问</a:t>
+            </a:r>
+          </a:p>
+          <a:p>
+            <a:r>
+              <a:rPr sz="1600">
+                <a:solidFill>
+                  <a:srgbClr val="000000"/>
+                </a:solidFill>
+              </a:rPr>
+              <a:t>状态空间太大需要剪枝</a:t>
+            </a:r>
+          </a:p>
+          <a:p>
+            <a:r>
+              <a:rPr sz="1600">
+                <a:solidFill>
+                  <a:srgbClr val="000000"/>
+                </a:solidFill>
+              </a:rPr>
+              <a:t>Python递归深度限制</a:t>
+            </a:r>
+          </a:p>
+        </p:txBody>
+      </p:sp>
+    </p:spTree>
+  </p:cSld>
+  <p:clrMapOvr>
+    <a:masterClrMapping/>
+  </p:clrMapOvr>
+</p:sld>
+</file>
+
+<file path=ppt/slides/slide7.xml><?xml version="1.0" encoding="utf-8"?>
+<p:sld xmlns:a="http://schemas.openxmlformats.org/drawingml/2006/main" xmlns:p="http://schemas.openxmlformats.org/presentationml/2006/main" xmlns:r="http://schemas.openxmlformats.org/officeDocument/2006/relationships">
+  <p:cSld>
+    <p:spTree>
+      <p:nvGrpSpPr>
+        <p:cNvPr id="1" name=""/>
+        <p:cNvGrpSpPr/>
+        <p:nvPr/>
+      </p:nvGrpSpPr>
+      <p:grpSpPr/>
+      <p:sp>
+        <p:nvSpPr>
+          <p:cNvPr id="2" name="TextBox 1"/>
+          <p:cNvSpPr txBox="1"/>
+          <p:nvPr/>
+        </p:nvSpPr>
+        <p:spPr>
+          <a:xfrm>
+            <a:off x="914400" y="457200"/>
+            <a:ext cx="10058400" cy="914400"/>
+          </a:xfrm>
+          <a:prstGeom prst="rect">
+            <a:avLst/>
+          </a:prstGeom>
+          <a:noFill/>
+        </p:spPr>
+        <p:txBody>
+          <a:bodyPr wrap="none">
+            <a:spAutoFit/>
+          </a:bodyPr>
+          <a:lstStyle/>
+          <a:p>
+            <a:r>
+              <a:rPr sz="2800" b="1">
+                <a:solidFill>
+                  <a:srgbClr val="8B0000"/>
+                </a:solidFill>
+              </a:rPr>
+              <a:t>练习题目</a:t>
+            </a:r>
+          </a:p>
+        </p:txBody>
+      </p:sp>
+      <p:sp>
+        <p:nvSpPr>
+          <p:cNvPr id="3" name="TextBox 2"/>
+          <p:cNvSpPr txBox="1"/>
+          <p:nvPr/>
+        </p:nvSpPr>
+        <p:spPr>
+          <a:xfrm>
+            <a:off x="914400" y="1371600"/>
+            <a:ext cx="10058400" cy="5029200"/>
+          </a:xfrm>
+          <a:prstGeom prst="rect">
+            <a:avLst/>
+          </a:prstGeom>
+          <a:noFill/>
+        </p:spPr>
+        <p:txBody>
+          <a:bodyPr wrap="none">
+            <a:spAutoFit/>
+          </a:bodyPr>
+          <a:lstStyle/>
+          <a:p/>
+          <a:p>
+            <a:r>
+              <a:rPr sz="1600">
+                <a:solidFill>
+                  <a:srgbClr val="000000"/>
+                </a:solidFill>
+              </a:rPr>
+              <a:t>JD141 雾中排阵</a:t>
+            </a:r>
+          </a:p>
+          <a:p>
+            <a:r>
+              <a:rPr sz="1600">
+                <a:solidFill>
+                  <a:srgbClr val="000000"/>
+                </a:solidFill>
+              </a:rPr>
+              <a:t>JD142 棋盘布后</a:t>
+            </a:r>
+          </a:p>
+          <a:p>
+            <a:r>
+              <a:rPr sz="1600">
+                <a:solidFill>
+                  <a:srgbClr val="000000"/>
+                </a:solidFill>
+              </a:rPr>
+              <a:t>JD143 迷宫寻路</a:t>
+            </a:r>
+          </a:p>
+        </p:txBody>
+      </p:sp>
+    </p:spTree>
+  </p:cSld>
+  <p:clrMapOvr>
+    <a:masterClrMapping/>
+  </p:clrMapOvr>
+</p:sld>
+</file>
+
+<file path=ppt/slides/slide8.xml><?xml version="1.0" encoding="utf-8"?>
+<p:sld xmlns:a="http://schemas.openxmlformats.org/drawingml/2006/main" xmlns:p="http://schemas.openxmlformats.org/presentationml/2006/main" xmlns:r="http://schemas.openxmlformats.org/officeDocument/2006/relationships">
+  <p:cSld>
+    <p:spTree>
+      <p:nvGrpSpPr>
+        <p:cNvPr id="1" name=""/>
+        <p:cNvGrpSpPr/>
+        <p:nvPr/>
+      </p:nvGrpSpPr>
+      <p:grpSpPr/>
+      <p:sp>
+        <p:nvSpPr>
+          <p:cNvPr id="2" name="TextBox 1"/>
+          <p:cNvSpPr txBox="1"/>
+          <p:nvPr/>
+        </p:nvSpPr>
+        <p:spPr>
+          <a:xfrm>
+            <a:off x="914400" y="457200"/>
+            <a:ext cx="10058400" cy="914400"/>
+          </a:xfrm>
+          <a:prstGeom prst="rect">
+            <a:avLst/>
+          </a:prstGeom>
+          <a:noFill/>
+        </p:spPr>
+        <p:txBody>
+          <a:bodyPr wrap="none">
+            <a:spAutoFit/>
+          </a:bodyPr>
+          <a:lstStyle/>
+          <a:p>
+            <a:r>
+              <a:rPr sz="2800" b="1">
+                <a:solidFill>
+                  <a:srgbClr val="8B0000"/>
+                </a:solidFill>
+              </a:rPr>
+              <a:t>本章小结</a:t>
+            </a:r>
+          </a:p>
+        </p:txBody>
+      </p:sp>
+      <p:sp>
+        <p:nvSpPr>
+          <p:cNvPr id="3" name="TextBox 2"/>
+          <p:cNvSpPr txBox="1"/>
+          <p:nvPr/>
+        </p:nvSpPr>
+        <p:spPr>
+          <a:xfrm>
+            <a:off x="914400" y="1371600"/>
+            <a:ext cx="10058400" cy="5029200"/>
+          </a:xfrm>
+          <a:prstGeom prst="rect">
+            <a:avLst/>
+          </a:prstGeom>
+          <a:noFill/>
+        </p:spPr>
+        <p:txBody>
+          <a:bodyPr wrap="none">
+            <a:spAutoFit/>
+          </a:bodyPr>
+          <a:lstStyle/>
+          <a:p/>
+          <a:p>
+            <a:r>
+              <a:rPr sz="1600">
+                <a:solidFill>
+                  <a:srgbClr val="000000"/>
+                </a:solidFill>
+              </a:rPr>
+              <a:t>掌握核心概念</a:t>
+            </a:r>
+          </a:p>
+          <a:p>
+            <a:r>
+              <a:rPr sz="1600">
+                <a:solidFill>
+                  <a:srgbClr val="000000"/>
+                </a:solidFill>
+              </a:rPr>
+              <a:t>多做练习</a:t>
+            </a:r>
+          </a:p>
+          <a:p>
+            <a:r>
+              <a:rPr sz="1600">
+                <a:solidFill>
+                  <a:srgbClr val="000000"/>
+                </a:solidFill>
+              </a:rPr>
+              <a:t>注意边界条件</a:t>
+            </a:r>
+          </a:p>
+          <a:p>
+            <a:r>
+              <a:rPr sz="1600">
+                <a:solidFill>
+                  <a:srgbClr val="000000"/>
+                </a:solidFill>
+              </a:rPr>
+              <a:t>理解算法思想而非死记代码</a:t>
             </a:r>
           </a:p>
         </p:txBody>

--- a/textbook/ppt/chapter13_ppt.pptx
+++ b/textbook/ppt/chapter13_ppt.pptx
@@ -12,7 +12,6 @@
     <p:sldId id="260" r:id="rId11"/>
     <p:sldId id="261" r:id="rId12"/>
     <p:sldId id="262" r:id="rId13"/>
-    <p:sldId id="263" r:id="rId14"/>
   </p:sldIdLst>
   <p:sldSz cx="12188952" cy="6858000" type="screen4x3"/>
   <p:notesSz cx="6858000" cy="9144000"/>
@@ -3124,18 +3123,7 @@
                   <a:srgbClr val="8B0000"/>
                 </a:solidFill>
               </a:rPr>
-              <a:t>第13章 迷雾寻踪</a:t>
-            </a:r>
-          </a:p>
-          <a:p>
-            <a:pPr algn="ctr"/>
-            <a:r>
-              <a:rPr sz="2400">
-                <a:solidFill>
-                  <a:srgbClr val="6B5D4D"/>
-                </a:solidFill>
-              </a:rPr>
-              <a:t>搜索与回溯</a:t>
+              <a:t>第13章</a:t>
             </a:r>
           </a:p>
         </p:txBody>
@@ -3166,8 +3154,8 @@
         </p:nvSpPr>
         <p:spPr>
           <a:xfrm>
-            <a:off x="914400" y="457200"/>
-            <a:ext cx="10058400" cy="914400"/>
+            <a:off x="457200" y="274320"/>
+            <a:ext cx="10972800" cy="731520"/>
           </a:xfrm>
           <a:prstGeom prst="rect">
             <a:avLst/>
@@ -3181,7 +3169,7 @@
           <a:lstStyle/>
           <a:p>
             <a:r>
-              <a:rPr sz="2800" b="1">
+              <a:rPr sz="2400" b="1">
                 <a:solidFill>
                   <a:srgbClr val="8B0000"/>
                 </a:solidFill>
@@ -3199,8 +3187,8 @@
         </p:nvSpPr>
         <p:spPr>
           <a:xfrm>
-            <a:off x="914400" y="1371600"/>
-            <a:ext cx="10058400" cy="4572000"/>
+            <a:off x="457200" y="1097280"/>
+            <a:ext cx="10972800" cy="5029200"/>
           </a:xfrm>
           <a:prstGeom prst="rect">
             <a:avLst/>
@@ -3215,26 +3203,42 @@
           <a:p/>
           <a:p>
             <a:r>
-              <a:rPr sz="1800"/>
-              <a:t>• DFS深度优先的基本概念与应用</a:t>
-            </a:r>
-          </a:p>
-          <a:p>
-            <a:r>
-              <a:rPr sz="1800"/>
-              <a:t>• BFS广度优先的基本概念与应用</a:t>
-            </a:r>
-          </a:p>
-          <a:p>
-            <a:r>
-              <a:rPr sz="1800"/>
-              <a:t>• 回溯框架的基本概念与应用</a:t>
-            </a:r>
-          </a:p>
-          <a:p>
-            <a:r>
-              <a:rPr sz="1800"/>
-              <a:t>• 剪枝优化的基本概念与应用</a:t>
+              <a:rPr sz="1400">
+                <a:solidFill>
+                  <a:srgbClr val="000000"/>
+                </a:solidFill>
+              </a:rPr>
+              <a:t>DFS：深度优先，用栈/递归实现</a:t>
+            </a:r>
+          </a:p>
+          <a:p>
+            <a:r>
+              <a:rPr sz="1400">
+                <a:solidFill>
+                  <a:srgbClr val="000000"/>
+                </a:solidFill>
+              </a:rPr>
+              <a:t>BFS：广度优先，用队列实现</a:t>
+            </a:r>
+          </a:p>
+          <a:p>
+            <a:r>
+              <a:rPr sz="1400">
+                <a:solidFill>
+                  <a:srgbClr val="000000"/>
+                </a:solidFill>
+              </a:rPr>
+              <a:t>回溯：选→递归→撤销，探索所有可能</a:t>
+            </a:r>
+          </a:p>
+          <a:p>
+            <a:r>
+              <a:rPr sz="1400">
+                <a:solidFill>
+                  <a:srgbClr val="000000"/>
+                </a:solidFill>
+              </a:rPr>
+              <a:t>剪枝：提前终止无效分支，减少搜索量</a:t>
             </a:r>
           </a:p>
         </p:txBody>
@@ -3265,8 +3269,8 @@
         </p:nvSpPr>
         <p:spPr>
           <a:xfrm>
-            <a:off x="914400" y="457200"/>
-            <a:ext cx="10058400" cy="914400"/>
+            <a:off x="457200" y="274320"/>
+            <a:ext cx="10972800" cy="731520"/>
           </a:xfrm>
           <a:prstGeom prst="rect">
             <a:avLst/>
@@ -3280,12 +3284,12 @@
           <a:lstStyle/>
           <a:p>
             <a:r>
-              <a:rPr sz="2800" b="1">
+              <a:rPr sz="2400" b="1">
                 <a:solidFill>
                   <a:srgbClr val="8B0000"/>
                 </a:solidFill>
               </a:rPr>
-              <a:t>本章概览</a:t>
+              <a:t>C++ 代码示例</a:t>
             </a:r>
           </a:p>
         </p:txBody>
@@ -3298,8 +3302,8 @@
         </p:nvSpPr>
         <p:spPr>
           <a:xfrm>
-            <a:off x="914400" y="1371600"/>
-            <a:ext cx="10058400" cy="5029200"/>
+            <a:off x="457200" y="1097280"/>
+            <a:ext cx="10972800" cy="5029200"/>
           </a:xfrm>
           <a:prstGeom prst="rect">
             <a:avLst/>
@@ -3314,42 +3318,27 @@
           <a:p/>
           <a:p>
             <a:r>
-              <a:rPr sz="1600">
+              <a:rPr sz="1200">
                 <a:solidFill>
                   <a:srgbClr val="000000"/>
                 </a:solidFill>
               </a:rPr>
-              <a:t>DFS：深度优先，用栈/递归实现</a:t>
-            </a:r>
-          </a:p>
-          <a:p>
-            <a:r>
-              <a:rPr sz="1600">
-                <a:solidFill>
-                  <a:srgbClr val="000000"/>
-                </a:solidFill>
-              </a:rPr>
-              <a:t>BFS：广度优先，用队列实现</a:t>
-            </a:r>
-          </a:p>
-          <a:p>
-            <a:r>
-              <a:rPr sz="1600">
-                <a:solidFill>
-                  <a:srgbClr val="000000"/>
-                </a:solidFill>
-              </a:rPr>
-              <a:t>回溯：选→递归→撤销</a:t>
-            </a:r>
-          </a:p>
-          <a:p>
-            <a:r>
-              <a:rPr sz="1600">
-                <a:solidFill>
-                  <a:srgbClr val="000000"/>
-                </a:solidFill>
-              </a:rPr>
-              <a:t>剪枝：提前终止无效分支</a:t>
+              <a:t>// DFS全排列
+void dfs(int depth) {
+    if (depth == n) {
+        for (int i = 0; i &lt; n; i++) cout &lt;&lt; path[i] &lt;&lt; ' ';
+        cout &lt;&lt; endl;
+        return;
+    }
+    for (int i = 1; i &lt;= n; i++) {
+        if (!used[i]) {
+            used[i] = true;
+            path[depth] = i;
+            dfs(depth + 1);
+            used[i] = false;  // 回溯
+        }
+    }
+}</a:t>
             </a:r>
           </a:p>
         </p:txBody>
@@ -3380,8 +3369,8 @@
         </p:nvSpPr>
         <p:spPr>
           <a:xfrm>
-            <a:off x="914400" y="457200"/>
-            <a:ext cx="10058400" cy="914400"/>
+            <a:off x="457200" y="274320"/>
+            <a:ext cx="10972800" cy="731520"/>
           </a:xfrm>
           <a:prstGeom prst="rect">
             <a:avLst/>
@@ -3395,12 +3384,12 @@
           <a:lstStyle/>
           <a:p>
             <a:r>
-              <a:rPr sz="2800" b="1">
+              <a:rPr sz="2400" b="1">
                 <a:solidFill>
                   <a:srgbClr val="8B0000"/>
                 </a:solidFill>
               </a:rPr>
-              <a:t>C++ 代码示例</a:t>
+              <a:t>Python 代码示例</a:t>
             </a:r>
           </a:p>
         </p:txBody>
@@ -3413,8 +3402,8 @@
         </p:nvSpPr>
         <p:spPr>
           <a:xfrm>
-            <a:off x="914400" y="1371600"/>
-            <a:ext cx="10058400" cy="5029200"/>
+            <a:off x="457200" y="1097280"/>
+            <a:ext cx="10972800" cy="5029200"/>
           </a:xfrm>
           <a:prstGeom prst="rect">
             <a:avLst/>
@@ -3429,22 +3418,22 @@
           <a:p/>
           <a:p>
             <a:r>
-              <a:rPr sz="1400">
+              <a:rPr sz="1200">
                 <a:solidFill>
                   <a:srgbClr val="000000"/>
                 </a:solidFill>
               </a:rPr>
-              <a:t>void dfs(int u) {
-    if (u == n) { output(); return; }
-    for (int i = 1; i &lt;= n; i++) {
-        if (!used[i]) {
-            used[i] = true;
-            path[u] = i;
-            dfs(u + 1);
-            used[i] = false;
-        }
-    }
-}</a:t>
+              <a:t># DFS全排列
+def dfs(depth):
+    if depth == n:
+        print(' '.join(map(str, path)))
+        return
+    for i in range(1, n+1):
+        if not used[i]:
+            used[i] = True
+            path[depth] = i
+            dfs(depth + 1)
+            used[i] = False  # 回溯</a:t>
             </a:r>
           </a:p>
         </p:txBody>
@@ -3475,8 +3464,8 @@
         </p:nvSpPr>
         <p:spPr>
           <a:xfrm>
-            <a:off x="914400" y="457200"/>
-            <a:ext cx="10058400" cy="914400"/>
+            <a:off x="457200" y="274320"/>
+            <a:ext cx="10972800" cy="731520"/>
           </a:xfrm>
           <a:prstGeom prst="rect">
             <a:avLst/>
@@ -3490,12 +3479,12 @@
           <a:lstStyle/>
           <a:p>
             <a:r>
-              <a:rPr sz="2800" b="1">
+              <a:rPr sz="2400" b="1">
                 <a:solidFill>
                   <a:srgbClr val="8B0000"/>
                 </a:solidFill>
               </a:rPr>
-              <a:t>Python 代码示例</a:t>
+              <a:t>常见错误</a:t>
             </a:r>
           </a:p>
         </p:txBody>
@@ -3508,8 +3497,8 @@
         </p:nvSpPr>
         <p:spPr>
           <a:xfrm>
-            <a:off x="914400" y="1371600"/>
-            <a:ext cx="10058400" cy="5029200"/>
+            <a:off x="457200" y="1097280"/>
+            <a:ext cx="10972800" cy="5029200"/>
           </a:xfrm>
           <a:prstGeom prst="rect">
             <a:avLst/>
@@ -3529,15 +3518,37 @@
                   <a:srgbClr val="000000"/>
                 </a:solidFill>
               </a:rPr>
-              <a:t>def dfs(u):
-    if u == n:
-        output(); return
-    for i in range(1, n+1):
-        if not used[i]:
-            used[i] = True
-            path[u] = i
-            dfs(u + 1)
-            used[i] = False</a:t>
+              <a:t>DFS忘记回溯（used[i]=false）</a:t>
+            </a:r>
+          </a:p>
+          <a:p>
+            <a:r>
+              <a:rPr sz="1400">
+                <a:solidFill>
+                  <a:srgbClr val="000000"/>
+                </a:solidFill>
+              </a:rPr>
+              <a:t>BFS忘记标记已访问（可能重复入队）</a:t>
+            </a:r>
+          </a:p>
+          <a:p>
+            <a:r>
+              <a:rPr sz="1400">
+                <a:solidFill>
+                  <a:srgbClr val="000000"/>
+                </a:solidFill>
+              </a:rPr>
+              <a:t>状态空间太大需要剪枝</a:t>
+            </a:r>
+          </a:p>
+          <a:p>
+            <a:r>
+              <a:rPr sz="1400">
+                <a:solidFill>
+                  <a:srgbClr val="000000"/>
+                </a:solidFill>
+              </a:rPr>
+              <a:t>Python递归深度限制，默认1000层</a:t>
             </a:r>
           </a:p>
         </p:txBody>
@@ -3568,8 +3579,8 @@
         </p:nvSpPr>
         <p:spPr>
           <a:xfrm>
-            <a:off x="914400" y="457200"/>
-            <a:ext cx="10058400" cy="914400"/>
+            <a:off x="457200" y="274320"/>
+            <a:ext cx="10972800" cy="731520"/>
           </a:xfrm>
           <a:prstGeom prst="rect">
             <a:avLst/>
@@ -3583,12 +3594,12 @@
           <a:lstStyle/>
           <a:p>
             <a:r>
-              <a:rPr sz="2800" b="1">
+              <a:rPr sz="2400" b="1">
                 <a:solidFill>
                   <a:srgbClr val="8B0000"/>
                 </a:solidFill>
               </a:rPr>
-              <a:t>常见错误</a:t>
+              <a:t>练习题目</a:t>
             </a:r>
           </a:p>
         </p:txBody>
@@ -3601,8 +3612,8 @@
         </p:nvSpPr>
         <p:spPr>
           <a:xfrm>
-            <a:off x="914400" y="1371600"/>
-            <a:ext cx="10058400" cy="5029200"/>
+            <a:off x="457200" y="1097280"/>
+            <a:ext cx="10972800" cy="5029200"/>
           </a:xfrm>
           <a:prstGeom prst="rect">
             <a:avLst/>
@@ -3617,42 +3628,32 @@
           <a:p/>
           <a:p>
             <a:r>
-              <a:rPr sz="1600">
+              <a:rPr sz="1400">
                 <a:solidFill>
                   <a:srgbClr val="000000"/>
                 </a:solidFill>
               </a:rPr>
-              <a:t>DFS忘记回溯</a:t>
-            </a:r>
-          </a:p>
-          <a:p>
-            <a:r>
-              <a:rPr sz="1600">
+              <a:t>JD141 雾中排阵 - 全排列 (Medium)</a:t>
+            </a:r>
+          </a:p>
+          <a:p>
+            <a:r>
+              <a:rPr sz="1400">
                 <a:solidFill>
                   <a:srgbClr val="000000"/>
                 </a:solidFill>
               </a:rPr>
-              <a:t>BFS忘记标记已访问</a:t>
-            </a:r>
-          </a:p>
-          <a:p>
-            <a:r>
-              <a:rPr sz="1600">
+              <a:t>JD142 棋盘布后 - N皇后 (Hard)</a:t>
+            </a:r>
+          </a:p>
+          <a:p>
+            <a:r>
+              <a:rPr sz="1400">
                 <a:solidFill>
                   <a:srgbClr val="000000"/>
                 </a:solidFill>
               </a:rPr>
-              <a:t>状态空间太大需要剪枝</a:t>
-            </a:r>
-          </a:p>
-          <a:p>
-            <a:r>
-              <a:rPr sz="1600">
-                <a:solidFill>
-                  <a:srgbClr val="000000"/>
-                </a:solidFill>
-              </a:rPr>
-              <a:t>Python递归深度限制</a:t>
+              <a:t>JD143 迷宫寻路 - BFS最短路 (Medium)</a:t>
             </a:r>
           </a:p>
         </p:txBody>
@@ -3683,8 +3684,8 @@
         </p:nvSpPr>
         <p:spPr>
           <a:xfrm>
-            <a:off x="914400" y="457200"/>
-            <a:ext cx="10058400" cy="914400"/>
+            <a:off x="457200" y="274320"/>
+            <a:ext cx="10972800" cy="731520"/>
           </a:xfrm>
           <a:prstGeom prst="rect">
             <a:avLst/>
@@ -3698,12 +3699,12 @@
           <a:lstStyle/>
           <a:p>
             <a:r>
-              <a:rPr sz="2800" b="1">
+              <a:rPr sz="2400" b="1">
                 <a:solidFill>
                   <a:srgbClr val="8B0000"/>
                 </a:solidFill>
               </a:rPr>
-              <a:t>练习题目</a:t>
+              <a:t>本章小结</a:t>
             </a:r>
           </a:p>
         </p:txBody>
@@ -3716,8 +3717,8 @@
         </p:nvSpPr>
         <p:spPr>
           <a:xfrm>
-            <a:off x="914400" y="1371600"/>
-            <a:ext cx="10058400" cy="5029200"/>
+            <a:off x="457200" y="1097280"/>
+            <a:ext cx="10972800" cy="5029200"/>
           </a:xfrm>
           <a:prstGeom prst="rect">
             <a:avLst/>
@@ -3732,147 +3733,42 @@
           <a:p/>
           <a:p>
             <a:r>
-              <a:rPr sz="1600">
+              <a:rPr sz="1400">
                 <a:solidFill>
                   <a:srgbClr val="000000"/>
                 </a:solidFill>
               </a:rPr>
-              <a:t>JD141 雾中排阵</a:t>
-            </a:r>
-          </a:p>
-          <a:p>
-            <a:r>
-              <a:rPr sz="1600">
+              <a:t>本章学习了第13章的核心概念</a:t>
+            </a:r>
+          </a:p>
+          <a:p>
+            <a:r>
+              <a:rPr sz="1400">
                 <a:solidFill>
                   <a:srgbClr val="000000"/>
                 </a:solidFill>
               </a:rPr>
-              <a:t>JD142 棋盘布后</a:t>
-            </a:r>
-          </a:p>
-          <a:p>
-            <a:r>
-              <a:rPr sz="1600">
+              <a:t>多做练习是掌握算法的关键</a:t>
+            </a:r>
+          </a:p>
+          <a:p>
+            <a:r>
+              <a:rPr sz="1400">
                 <a:solidFill>
                   <a:srgbClr val="000000"/>
                 </a:solidFill>
               </a:rPr>
-              <a:t>JD143 迷宫寻路</a:t>
-            </a:r>
-          </a:p>
-        </p:txBody>
-      </p:sp>
-    </p:spTree>
-  </p:cSld>
-  <p:clrMapOvr>
-    <a:masterClrMapping/>
-  </p:clrMapOvr>
-</p:sld>
-</file>
-
-<file path=ppt/slides/slide8.xml><?xml version="1.0" encoding="utf-8"?>
-<p:sld xmlns:a="http://schemas.openxmlformats.org/drawingml/2006/main" xmlns:p="http://schemas.openxmlformats.org/presentationml/2006/main" xmlns:r="http://schemas.openxmlformats.org/officeDocument/2006/relationships">
-  <p:cSld>
-    <p:spTree>
-      <p:nvGrpSpPr>
-        <p:cNvPr id="1" name=""/>
-        <p:cNvGrpSpPr/>
-        <p:nvPr/>
-      </p:nvGrpSpPr>
-      <p:grpSpPr/>
-      <p:sp>
-        <p:nvSpPr>
-          <p:cNvPr id="2" name="TextBox 1"/>
-          <p:cNvSpPr txBox="1"/>
-          <p:nvPr/>
-        </p:nvSpPr>
-        <p:spPr>
-          <a:xfrm>
-            <a:off x="914400" y="457200"/>
-            <a:ext cx="10058400" cy="914400"/>
-          </a:xfrm>
-          <a:prstGeom prst="rect">
-            <a:avLst/>
-          </a:prstGeom>
-          <a:noFill/>
-        </p:spPr>
-        <p:txBody>
-          <a:bodyPr wrap="none">
-            <a:spAutoFit/>
-          </a:bodyPr>
-          <a:lstStyle/>
-          <a:p>
-            <a:r>
-              <a:rPr sz="2800" b="1">
-                <a:solidFill>
-                  <a:srgbClr val="8B0000"/>
+              <a:t>理解算法思想比死记代码更重要</a:t>
+            </a:r>
+          </a:p>
+          <a:p>
+            <a:r>
+              <a:rPr sz="1400">
+                <a:solidFill>
+                  <a:srgbClr val="000000"/>
                 </a:solidFill>
               </a:rPr>
-              <a:t>本章小结</a:t>
-            </a:r>
-          </a:p>
-        </p:txBody>
-      </p:sp>
-      <p:sp>
-        <p:nvSpPr>
-          <p:cNvPr id="3" name="TextBox 2"/>
-          <p:cNvSpPr txBox="1"/>
-          <p:nvPr/>
-        </p:nvSpPr>
-        <p:spPr>
-          <a:xfrm>
-            <a:off x="914400" y="1371600"/>
-            <a:ext cx="10058400" cy="5029200"/>
-          </a:xfrm>
-          <a:prstGeom prst="rect">
-            <a:avLst/>
-          </a:prstGeom>
-          <a:noFill/>
-        </p:spPr>
-        <p:txBody>
-          <a:bodyPr wrap="none">
-            <a:spAutoFit/>
-          </a:bodyPr>
-          <a:lstStyle/>
-          <a:p/>
-          <a:p>
-            <a:r>
-              <a:rPr sz="1600">
-                <a:solidFill>
-                  <a:srgbClr val="000000"/>
-                </a:solidFill>
-              </a:rPr>
-              <a:t>掌握核心概念</a:t>
-            </a:r>
-          </a:p>
-          <a:p>
-            <a:r>
-              <a:rPr sz="1600">
-                <a:solidFill>
-                  <a:srgbClr val="000000"/>
-                </a:solidFill>
-              </a:rPr>
-              <a:t>多做练习</a:t>
-            </a:r>
-          </a:p>
-          <a:p>
-            <a:r>
-              <a:rPr sz="1600">
-                <a:solidFill>
-                  <a:srgbClr val="000000"/>
-                </a:solidFill>
-              </a:rPr>
-              <a:t>注意边界条件</a:t>
-            </a:r>
-          </a:p>
-          <a:p>
-            <a:r>
-              <a:rPr sz="1600">
-                <a:solidFill>
-                  <a:srgbClr val="000000"/>
-                </a:solidFill>
-              </a:rPr>
-              <a:t>理解算法思想而非死记代码</a:t>
+              <a:t>遇到问题先画图、再想算法、最后写代码</a:t>
             </a:r>
           </a:p>
         </p:txBody>

--- a/textbook/ppt/chapter13_ppt.pptx
+++ b/textbook/ppt/chapter13_ppt.pptx
@@ -12,6 +12,7 @@
     <p:sldId id="260" r:id="rId11"/>
     <p:sldId id="261" r:id="rId12"/>
     <p:sldId id="262" r:id="rId13"/>
+    <p:sldId id="263" r:id="rId14"/>
   </p:sldIdLst>
   <p:sldSz cx="12188952" cy="6858000" type="screen4x3"/>
   <p:notesSz cx="6858000" cy="9144000"/>
@@ -3769,6 +3770,91 @@
                 </a:solidFill>
               </a:rPr>
               <a:t>遇到问题先画图、再想算法、最后写代码</a:t>
+            </a:r>
+          </a:p>
+        </p:txBody>
+      </p:sp>
+    </p:spTree>
+  </p:cSld>
+  <p:clrMapOvr>
+    <a:masterClrMapping/>
+  </p:clrMapOvr>
+</p:sld>
+</file>
+
+<file path=ppt/slides/slide8.xml><?xml version="1.0" encoding="utf-8"?>
+<p:sld xmlns:a="http://schemas.openxmlformats.org/drawingml/2006/main" xmlns:p="http://schemas.openxmlformats.org/presentationml/2006/main" xmlns:r="http://schemas.openxmlformats.org/officeDocument/2006/relationships">
+  <p:cSld>
+    <p:spTree>
+      <p:nvGrpSpPr>
+        <p:cNvPr id="1" name=""/>
+        <p:cNvGrpSpPr/>
+        <p:nvPr/>
+      </p:nvGrpSpPr>
+      <p:grpSpPr/>
+      <p:sp>
+        <p:nvSpPr>
+          <p:cNvPr id="2" name="TextBox 1"/>
+          <p:cNvSpPr txBox="1"/>
+          <p:nvPr/>
+        </p:nvSpPr>
+        <p:spPr>
+          <a:xfrm>
+            <a:off x="457200" y="274320"/>
+            <a:ext cx="10972800" cy="731520"/>
+          </a:xfrm>
+          <a:prstGeom prst="rect">
+            <a:avLst/>
+          </a:prstGeom>
+          <a:noFill/>
+        </p:spPr>
+        <p:txBody>
+          <a:bodyPr wrap="none">
+            <a:spAutoFit/>
+          </a:bodyPr>
+          <a:lstStyle/>
+          <a:p>
+            <a:r>
+              <a:rPr sz="2400" b="1">
+                <a:solidFill>
+                  <a:srgbClr val="8B0000"/>
+                </a:solidFill>
+              </a:rPr>
+              <a:t>本章概览</a:t>
+            </a:r>
+          </a:p>
+        </p:txBody>
+      </p:sp>
+      <p:sp>
+        <p:nvSpPr>
+          <p:cNvPr id="3" name="TextBox 2"/>
+          <p:cNvSpPr txBox="1"/>
+          <p:nvPr/>
+        </p:nvSpPr>
+        <p:spPr>
+          <a:xfrm>
+            <a:off x="457200" y="1097280"/>
+            <a:ext cx="10972800" cy="5029200"/>
+          </a:xfrm>
+          <a:prstGeom prst="rect">
+            <a:avLst/>
+          </a:prstGeom>
+          <a:noFill/>
+        </p:spPr>
+        <p:txBody>
+          <a:bodyPr wrap="none">
+            <a:spAutoFit/>
+          </a:bodyPr>
+          <a:lstStyle/>
+          <a:p/>
+          <a:p>
+            <a:r>
+              <a:rPr sz="1600">
+                <a:solidFill>
+                  <a:srgbClr val="000000"/>
+                </a:solidFill>
+              </a:rPr>
+              <a:t>本章学习搜索和回溯——DFS、BFS是图搜索的基础，回溯是枚举的利器。</a:t>
             </a:r>
           </a:p>
         </p:txBody>

--- a/textbook/ppt/chapter13_ppt.pptx
+++ b/textbook/ppt/chapter13_ppt.pptx
@@ -13,6 +13,7 @@
     <p:sldId id="261" r:id="rId12"/>
     <p:sldId id="262" r:id="rId13"/>
     <p:sldId id="263" r:id="rId14"/>
+    <p:sldId id="264" r:id="rId15"/>
   </p:sldIdLst>
   <p:sldSz cx="12188952" cy="6858000" type="screen4x3"/>
   <p:notesSz cx="6858000" cy="9144000"/>
@@ -3739,7 +3740,7 @@
                   <a:srgbClr val="000000"/>
                 </a:solidFill>
               </a:rPr>
-              <a:t>本章学习了第13章的核心概念</a:t>
+              <a:t/>
             </a:r>
           </a:p>
           <a:p>
@@ -3749,7 +3750,7 @@
                   <a:srgbClr val="000000"/>
                 </a:solidFill>
               </a:rPr>
-              <a:t>多做练习是掌握算法的关键</a:t>
+              <a:t/>
             </a:r>
           </a:p>
           <a:p>
@@ -3759,7 +3760,7 @@
                   <a:srgbClr val="000000"/>
                 </a:solidFill>
               </a:rPr>
-              <a:t>理解算法思想比死记代码更重要</a:t>
+              <a:t/>
             </a:r>
           </a:p>
           <a:p>
@@ -3769,7 +3770,7 @@
                   <a:srgbClr val="000000"/>
                 </a:solidFill>
               </a:rPr>
-              <a:t>遇到问题先画图、再想算法、最后写代码</a:t>
+              <a:t/>
             </a:r>
           </a:p>
         </p:txBody>
@@ -3855,6 +3856,121 @@
                 </a:solidFill>
               </a:rPr>
               <a:t>本章学习搜索和回溯——DFS、BFS是图搜索的基础，回溯是枚举的利器。</a:t>
+            </a:r>
+          </a:p>
+        </p:txBody>
+      </p:sp>
+    </p:spTree>
+  </p:cSld>
+  <p:clrMapOvr>
+    <a:masterClrMapping/>
+  </p:clrMapOvr>
+</p:sld>
+</file>
+
+<file path=ppt/slides/slide9.xml><?xml version="1.0" encoding="utf-8"?>
+<p:sld xmlns:a="http://schemas.openxmlformats.org/drawingml/2006/main" xmlns:p="http://schemas.openxmlformats.org/presentationml/2006/main" xmlns:r="http://schemas.openxmlformats.org/officeDocument/2006/relationships">
+  <p:cSld>
+    <p:spTree>
+      <p:nvGrpSpPr>
+        <p:cNvPr id="1" name=""/>
+        <p:cNvGrpSpPr/>
+        <p:nvPr/>
+      </p:nvGrpSpPr>
+      <p:grpSpPr/>
+      <p:sp>
+        <p:nvSpPr>
+          <p:cNvPr id="2" name="TextBox 1"/>
+          <p:cNvSpPr txBox="1"/>
+          <p:nvPr/>
+        </p:nvSpPr>
+        <p:spPr>
+          <a:xfrm>
+            <a:off x="457200" y="274320"/>
+            <a:ext cx="10972800" cy="731520"/>
+          </a:xfrm>
+          <a:prstGeom prst="rect">
+            <a:avLst/>
+          </a:prstGeom>
+          <a:noFill/>
+        </p:spPr>
+        <p:txBody>
+          <a:bodyPr wrap="none">
+            <a:spAutoFit/>
+          </a:bodyPr>
+          <a:lstStyle/>
+          <a:p>
+            <a:r>
+              <a:rPr sz="2400" b="1">
+                <a:solidFill>
+                  <a:srgbClr val="8B0000"/>
+                </a:solidFill>
+              </a:rPr>
+              <a:t>第13章 核心要点</a:t>
+            </a:r>
+          </a:p>
+        </p:txBody>
+      </p:sp>
+      <p:sp>
+        <p:nvSpPr>
+          <p:cNvPr id="3" name="TextBox 2"/>
+          <p:cNvSpPr txBox="1"/>
+          <p:nvPr/>
+        </p:nvSpPr>
+        <p:spPr>
+          <a:xfrm>
+            <a:off x="457200" y="1097280"/>
+            <a:ext cx="10972800" cy="5029200"/>
+          </a:xfrm>
+          <a:prstGeom prst="rect">
+            <a:avLst/>
+          </a:prstGeom>
+          <a:noFill/>
+        </p:spPr>
+        <p:txBody>
+          <a:bodyPr wrap="none">
+            <a:spAutoFit/>
+          </a:bodyPr>
+          <a:lstStyle/>
+          <a:p/>
+          <a:p>
+            <a:r>
+              <a:rPr sz="1600">
+                <a:solidFill>
+                  <a:srgbClr val="000000"/>
+                </a:solidFill>
+              </a:rPr>
+              <a:t>• DFS：深度优先，用栈/递归</a:t>
+            </a:r>
+          </a:p>
+          <a:p>
+            <a:r>
+              <a:rPr sz="1600">
+                <a:solidFill>
+                  <a:srgbClr val="000000"/>
+                </a:solidFill>
+              </a:rPr>
+              <a:t>• BFS：广度优先，用队列</a:t>
+            </a:r>
+          </a:p>
+          <a:p>
+            <a:r>
+              <a:rPr sz="1600">
+                <a:solidFill>
+                  <a:srgbClr val="000000"/>
+                </a:solidFill>
+              </a:rPr>
+              <a:t>• 回溯：选→递归→撤销</a:t>
+            </a:r>
+          </a:p>
+          <a:p>
+            <a:r>
+              <a:rPr sz="1600">
+                <a:solidFill>
+                  <a:srgbClr val="000000"/>
+                </a:solidFill>
+              </a:rPr>
+              <a:t>• 剪枝：提前终止无效分支</a:t>
             </a:r>
           </a:p>
         </p:txBody>
